--- a/10-28 Chat用来想Work用来干-演示文稿·可编辑.pptx
+++ b/10-28 Chat用来想Work用来干-演示文稿·可编辑.pptx
@@ -534,7 +534,25 @@
           <a:lstStyle/>
           <a:p>
             <a:r>
-              <a:t>一句话开场：今天讲 AI 从“会聊天”到“会干活”，二奢老板该怎么分工。</a:t>
+              <a:t>封面（约 30 秒）</a:t>
+            </a:r>
+          </a:p>
+          <a:p/>
+          <a:p>
+            <a:r>
+              <a:t>要讲清楚的事：今天讲什么。</a:t>
+            </a:r>
+          </a:p>
+          <a:p/>
+          <a:p>
+            <a:r>
+              <a:t>“今天这节课讲 AI。不讲怎么注册，也不讲哪个软件最火。就讲一件事：AI 已经从‘会聊天’走到‘会干活’了，二奢老板该怎么分工，哪些事让它陪你想，哪些活让它替你干。”</a:t>
+            </a:r>
+          </a:p>
+          <a:p/>
+          <a:p>
+            <a:r>
+              <a:t>过渡：先摸个底。</a:t>
             </a:r>
           </a:p>
         </p:txBody>
@@ -604,12 +622,49 @@
           <a:lstStyle/>
           <a:p>
             <a:r>
-              <a:t>3.0 交给你的不是一段话，是做好的东西。</a:t>
-            </a:r>
-          </a:p>
-          <a:p>
-            <a:r>
-              <a:t>回扣以前讲过的：03-19“普通 AI 是小工，智能体是包工头”；06-10 WorkBuddy；08-12 文件夹即智能体。</a:t>
+              <a:t>它在你的电脑上干活（约 1 分 30 秒）</a:t>
+            </a:r>
+          </a:p>
+          <a:p/>
+          <a:p>
+            <a:r>
+              <a:t>要讲清楚的事：3.0 交给你的不是一段话，是做好的东西。</a:t>
+            </a:r>
+          </a:p>
+          <a:p/>
+          <a:p>
+            <a:r>
+              <a:t>“拿一个真实的活来走一遍。周日晚上，我跟它说一句话：读这个文件夹里的录音，写下周 7 条朋友圈。”</a:t>
+            </a:r>
+          </a:p>
+          <a:p/>
+          <a:p>
+            <a:r>
+              <a:t>“它先打开文件夹，读录音逐字稿。读完写 7 条，写完存成一张表格，放回文件夹。我再给它设个定时任务，每天早上 9 点把当天那条推到我微信上，我拿起手机配图、发出去就行。”</a:t>
+            </a:r>
+          </a:p>
+          <a:p/>
+          <a:p>
+            <a:r>
+              <a:t>“你看这一整串，读文件、写、存、推送，中间不用我动手。我只做开头的派活和最后的验收。交给你的不是一段话，是做好的东西。”</a:t>
+            </a:r>
+          </a:p>
+          <a:p/>
+          <a:p>
+            <a:r>
+              <a:t>“这些零件我们以前都讲过：3 月份讲‘普通 AI 是小工，智能体是包工头’，6 月份讲 WorkBuddy，8 月份讲‘一个文件夹就是一个智能体’。今天把它们串起来。”</a:t>
+            </a:r>
+          </a:p>
+          <a:p/>
+          <a:p>
+            <a:r>
+              <a:t>互动：“有谁已经设过定时任务的，扣 1。”</a:t>
+            </a:r>
+          </a:p>
+          <a:p/>
+          <a:p>
+            <a:r>
+              <a:t>过渡：“那什么事该让它聊，什么事该让它干？我们逐行对照。”</a:t>
             </a:r>
           </a:p>
         </p:txBody>
@@ -679,7 +734,61 @@
           <a:lstStyle/>
           <a:p>
             <a:r>
-              <a:t>逐行对照着讲。重点讲“适合什么事”：还没想清楚的事用 Chat；想清楚的、重复的、量大的事用 Work。</a:t>
+              <a:t>Chat 和 Work 的区别（约 2 分 30 秒）</a:t>
+            </a:r>
+          </a:p>
+          <a:p/>
+          <a:p>
+            <a:r>
+              <a:t>要讲清楚的事：Chat 适合没想清楚的事，Work 适合想清楚的、重复的、量大的事。</a:t>
+            </a:r>
+          </a:p>
+          <a:p/>
+          <a:p>
+            <a:r>
+              <a:t>逐行讲，每行一句话，最后用“双 11”这个例子收住。</a:t>
+            </a:r>
+          </a:p>
+          <a:p/>
+          <a:p>
+            <a:r>
+              <a:t>“像谁：Chat 是参谋，陪你想；Work 是包工头，替你干。”</a:t>
+            </a:r>
+          </a:p>
+          <a:p/>
+          <a:p>
+            <a:r>
+              <a:t>“你给它什么：Chat，你给一个问题、一段想法；Work，你给一个文件夹，加一件交代清楚的活。”</a:t>
+            </a:r>
+          </a:p>
+          <a:p/>
+          <a:p>
+            <a:r>
+              <a:t>“它交给你什么：Chat 给你一段回答、一个思路；Work 给你一个做好的文件。”</a:t>
+            </a:r>
+          </a:p>
+          <a:p/>
+          <a:p>
+            <a:r>
+              <a:t>“怎么用：Chat 要来回追问，最好让它反问你；Work 要先把标准讲清楚，最后验收。”</a:t>
+            </a:r>
+          </a:p>
+          <a:p/>
+          <a:p>
+            <a:r>
+              <a:t>“最关键是这一行，适合什么事。拿双 11 举例：活动怎么搞还没想好，用 Chat，跟它聊出方案。方案定了，要出 30 条朋友圈、一套私信、海报上的字，这就是 Work 的活。”</a:t>
+            </a:r>
+          </a:p>
+          <a:p/>
+          <a:p>
+            <a:r>
+              <a:t>“最后看风险：Chat 最大的风险是一本正经地编；Work 最大的风险是动错文件、把隐私交出去。所以 Work 只给它一个文件夹，客户信息先删掉，后面会细讲。”</a:t>
+            </a:r>
+          </a:p>
+          <a:p/>
+          <a:p>
+            <a:r>
+              <a:t>过渡：“这么多行记不住没关系，下一页一句话记住。”</a:t>
             </a:r>
           </a:p>
         </p:txBody>
@@ -749,7 +858,31 @@
           <a:lstStyle/>
           <a:p>
             <a:r>
-              <a:t>可以这样说：想不清楚的事，别急着派活；派活之前想清楚，想清楚了就别再一句一句聊，直接派。</a:t>
+              <a:t>Chat 是参谋，Work 是包工头（约 1 分钟）</a:t>
+            </a:r>
+          </a:p>
+          <a:p/>
+          <a:p>
+            <a:r>
+              <a:t>“记住一句就够：Chat 是参谋，陪你想，你得在场，它问你答。Work 是包工头，替你干，交代清楚你就走开，回来验收。”</a:t>
+            </a:r>
+          </a:p>
+          <a:p/>
+          <a:p>
+            <a:r>
+              <a:t>“两种用反了的情况，我见得最多。第一种：事还没想清楚，一上来就让 Work 写双 11 文案，它很快干出一堆，你一条都用不上。第二种：在聊天框里一条一条让它写 7 条朋友圈，复制 7 次、粘贴 7 次，你自己成了搬运工。”</a:t>
+            </a:r>
+          </a:p>
+          <a:p/>
+          <a:p>
+            <a:r>
+              <a:t>“想不清楚的事，别急着派活；想清楚了，就别一句一句聊。”</a:t>
+            </a:r>
+          </a:p>
+          <a:p/>
+          <a:p>
+            <a:r>
+              <a:t>过渡：“落到二奢店里，哪些事该聊，哪些事该干？我给大家列了一张分工清单。”</a:t>
             </a:r>
           </a:p>
         </p:txBody>
@@ -819,7 +952,67 @@
           <a:lstStyle/>
           <a:p>
             <a:r>
-              <a:t>每件事举一个店里的例子。这一页的事，你得在场，它是陪你想。</a:t>
+              <a:t>用 Chat 想的 6 件事（约 2 分 30 秒）</a:t>
+            </a:r>
+          </a:p>
+          <a:p/>
+          <a:p>
+            <a:r>
+              <a:t>要讲清楚的事：这 6 件事的共同点是你得在场。它陪你想，最后你拍板。</a:t>
+            </a:r>
+          </a:p>
+          <a:p/>
+          <a:p>
+            <a:r>
+              <a:t>每条用一句话举例：</a:t>
+            </a:r>
+          </a:p>
+          <a:p/>
+          <a:p>
+            <a:r>
+              <a:t>“第一，定位。10/14 那节讲了三角图，可定位句自己一个人写，很难写清楚。让它反问你，问着问着就清楚了，等会儿我现场做。”</a:t>
+            </a:r>
+          </a:p>
+          <a:p/>
+          <a:p>
+            <a:r>
+              <a:t>“第二，活动方案。双 11 还有两周，先让它帮你搭个框架：做什么活动，给谁，怎么通知。”</a:t>
+            </a:r>
+          </a:p>
+          <a:p/>
+          <a:p>
+            <a:r>
+              <a:t>“第三，话术陪练。跟它说：‘你扮演一个只想白嫖估价的客户。’你来接，接完让它给你打分。”</a:t>
+            </a:r>
+          </a:p>
+          <a:p/>
+          <a:p>
+            <a:r>
+              <a:t>“第四，选题。一个爆款，只换人群、换品牌，就能出 30 个，等会儿也现场做。”</a:t>
+            </a:r>
+          </a:p>
+          <a:p/>
+          <a:p>
+            <a:r>
+              <a:t>“第五，复盘。把这个月的咨询数、成交数、超 30 天的库存说给它，让它问你问题。”</a:t>
+            </a:r>
+          </a:p>
+          <a:p/>
+          <a:p>
+            <a:r>
+              <a:t>“第六，学新规。平台出了新规，让它用大白话讲给你听。但最后一定看原文，因为它会编。”</a:t>
+            </a:r>
+          </a:p>
+          <a:p/>
+          <a:p>
+            <a:r>
+              <a:t>互动：“这 6 件里，你最想先做哪件？打序号。”</a:t>
+            </a:r>
+          </a:p>
+          <a:p/>
+          <a:p>
+            <a:r>
+              <a:t>过渡：“这是想的部分。干的部分呢？”</a:t>
             </a:r>
           </a:p>
         </p:txBody>
@@ -889,7 +1082,60 @@
           <a:lstStyle/>
           <a:p>
             <a:r>
-              <a:t>这一页的事，交代清楚就可以走开，回来验收。第 1 件和第 3 件今天会现场演示。</a:t>
+              <a:t>用 Work 干的 6 件事（约 2 分 30 秒）</a:t>
+            </a:r>
+          </a:p>
+          <a:p/>
+          <a:p>
+            <a:r>
+              <a:t>要讲清楚的事：这 6 件的共同点是量大、重复、格式固定。交代清楚，就可以走开。</a:t>
+            </a:r>
+          </a:p>
+          <a:p/>
+          <a:p>
+            <a:r>
+              <a:t>“第一，录音变朋友圈。你平时接待客户、拍视频、开车路上说的话，录下来，它给你出一周 7 条。等会儿现场演示。”</a:t>
+            </a:r>
+          </a:p>
+          <a:p/>
+          <a:p>
+            <a:r>
+              <a:t>“第二，批量上新文案。一个文件夹里放 20 只货的信息，它给你每只写一段描述。成色、瑕疵它照你给的写，你最后核一遍。”</a:t>
+            </a:r>
+          </a:p>
+          <a:p/>
+          <a:p>
+            <a:r>
+              <a:t>“第三，库存预警。库存表给它，它把超过 30 天的货按压款金额排出来，每只给一句建议。7 月份讲周转纪律就说过：超 30 天的货要有处理方案。”</a:t>
+            </a:r>
+          </a:p>
+          <a:p/>
+          <a:p>
+            <a:r>
+              <a:t>“第四，直播回放。回放转成文字给它，它给你出切片选题和口播稿。”</a:t>
+            </a:r>
+          </a:p>
+          <a:p/>
+          <a:p>
+            <a:r>
+              <a:t>“第五，客户分层。把成交记录里的姓名、电话删掉再给它，它帮你按买过的、卖过的、只咨询过的分好层，方便打标签。”</a:t>
+            </a:r>
+          </a:p>
+          <a:p/>
+          <a:p>
+            <a:r>
+              <a:t>“第六，定时任务。每天早上推当天的朋友圈，每周一出一份库存周报。设一次，以后天天自己跑。”</a:t>
+            </a:r>
+          </a:p>
+          <a:p/>
+          <a:p>
+            <a:r>
+              <a:t>过渡：</a:t>
+            </a:r>
+          </a:p>
+          <a:p>
+            <a:r>
+              <a:t>“说到这儿，有人心里已经在嘀咕了：AI 真有这么好用？我用了怎么没感觉？那多半是踩了下面这几个坑。”</a:t>
             </a:r>
           </a:p>
         </p:txBody>
@@ -959,12 +1205,49 @@
           <a:lstStyle/>
           <a:p>
             <a:r>
-              <a:t>逐条问学员：这句话你说过没有？</a:t>
-            </a:r>
-          </a:p>
-          <a:p>
-            <a:r>
-              <a:t>第 2 条：03-24 讲过 AI 预测行情的边界。第 4 条：10/7 讲过回复像 AI 会丢单；05-13 讲过过嘴改稿。</a:t>
+              <a:t>八个错误认知 · 上（约 2 分 30 秒）</a:t>
+            </a:r>
+          </a:p>
+          <a:p/>
+          <a:p>
+            <a:r>
+              <a:t>要讲清楚的事：一条一条问学员“这话你说过没有”，让他们自己对号入座。</a:t>
+            </a:r>
+          </a:p>
+          <a:p/>
+          <a:p>
+            <a:r>
+              <a:t>“第一个：‘AI 就是个聊天的。’前面讲过了，3.0 已经能干活，交给你的是做好的文件。”</a:t>
+            </a:r>
+          </a:p>
+          <a:p/>
+          <a:p>
+            <a:r>
+              <a:t>“第二个：‘AI 什么都懂。’它不懂你的店，不懂今天的行情，不懂的时候还会编。价格、行情、规定，一律自己核实。3 月份讲过，别让 AI 给你预测行情。”</a:t>
+            </a:r>
+          </a:p>
+          <a:p/>
+          <a:p>
+            <a:r>
+              <a:t>“第三个：‘一句话就能出好东西。’你给它一句话，它还你一段谁都能发的话。你给它多少，它还你多少。”</a:t>
+            </a:r>
+          </a:p>
+          <a:p/>
+          <a:p>
+            <a:r>
+              <a:t>“第四个：‘AI 写的可以直接发。’客户看得出 AI 味。10/7 讲过，回复像 AI 是会丢单的。AI 出初稿，你过嘴改稿，读出声，改成你自己的话。”</a:t>
+            </a:r>
+          </a:p>
+          <a:p/>
+          <a:p>
+            <a:r>
+              <a:t>互动：“这四条，你中了几条？公屏打数字。”</a:t>
+            </a:r>
+          </a:p>
+          <a:p/>
+          <a:p>
+            <a:r>
+              <a:t>过渡：“还有四条，后面这几条更要命。”</a:t>
             </a:r>
           </a:p>
         </p:txBody>
@@ -1034,7 +1317,43 @@
           <a:lstStyle/>
           <a:p>
             <a:r>
-              <a:t>第 5 条：04-08 讲过差生文具多。第 7 条：03-19 讲过表达能力是第一生产力。第 8 条：06-10 沙箱、08-12 文件夹即智能体。</a:t>
+              <a:t>八个错误认知 · 下（约 2 分 30 秒）</a:t>
+            </a:r>
+          </a:p>
+          <a:p/>
+          <a:p>
+            <a:r>
+              <a:t>“第五个：‘工具越多越好，天天追新。’4 月份说过，差生文具多。手机里装十个 AI，哪个都没用熟。一个 Chat、一个 Work，用熟就够了。”</a:t>
+            </a:r>
+          </a:p>
+          <a:p/>
+          <a:p>
+            <a:r>
+              <a:t>“第六个：‘AI 能帮我辨真假、定价格。’它不能拍板。看货、定价、收不收，最后都是你。我们的规矩一直没变：真假的事不交给 AI。拍张图让它判断真假，它也会很自信地给你一个结论，你敢信吗？它能干的，是帮你把报价依据整理好，你拿着去跟客户讲。”</a:t>
+            </a:r>
+          </a:p>
+          <a:p/>
+          <a:p>
+            <a:r>
+              <a:t>“第七个：‘AI 会抢我饭碗’，或者‘我学不会’。它抢的是重复的活，抢不走你看货的眼光、跟客户的关系。至于学不会：会说话就会用 AI。3 月份说过，表达能力是第一生产力。”</a:t>
+            </a:r>
+          </a:p>
+          <a:p/>
+          <a:p>
+            <a:r>
+              <a:t>“第八个：‘资料随便丢给它都没事。’身份证、手机号、银行卡，不进 AI。客户的聊天记录，先删掉名字和电话再给。用 Work 的时候，只给它一个文件夹，别把整台电脑都交给它。6 月份讲过沙箱，8 月份讲过一个项目一个文件夹，都是这个道理。”</a:t>
+            </a:r>
+          </a:p>
+          <a:p/>
+          <a:p>
+            <a:r>
+              <a:t>注意：第六条讲到“拍图辨真假”时，只说“别信、别用”，不要现场演示让 AI 判断真假。</a:t>
+            </a:r>
+          </a:p>
+          <a:p/>
+          <a:p>
+            <a:r>
+              <a:t>过渡：“那到底哪些能放心交给它，哪些必须你自己来？”</a:t>
             </a:r>
           </a:p>
         </p:txBody>
@@ -1104,7 +1423,43 @@
           <a:lstStyle/>
           <a:p>
             <a:r>
-              <a:t>左边放心交给它，右边必须你拍板。最后带一句三条安全底线。</a:t>
+              <a:t>放心交给它，必须你拍板（约 2 分钟）</a:t>
+            </a:r>
+          </a:p>
+          <a:p/>
+          <a:p>
+            <a:r>
+              <a:t>要讲清楚的事：能交出去的是活，交不出去的是责任。</a:t>
+            </a:r>
+          </a:p>
+          <a:p/>
+          <a:p>
+            <a:r>
+              <a:t>“左边这些，放心交给它：写初稿、改稿、换说法；整理、汇总、做表格；批量出东西、定时提醒；出框架、出选题、陪你练话术。”</a:t>
+            </a:r>
+          </a:p>
+          <a:p/>
+          <a:p>
+            <a:r>
+              <a:t>“右边这些，必须你拍板：这只包是真是假；最终报价、收不收；跟客户建立信任；发出去的东西合不合规；客户故事真不真。这些出了事，都是你担着，AI 不会替你担。”</a:t>
+            </a:r>
+          </a:p>
+          <a:p/>
+          <a:p>
+            <a:r>
+              <a:t>“一句话：能交出去的是活，交不出去的是责任。”</a:t>
+            </a:r>
+          </a:p>
+          <a:p/>
+          <a:p>
+            <a:r>
+              <a:t>“最后再强调一遍底线：客户姓名、电话、身份证、银行卡，先删掉再给 AI；Work 只给它一个文件夹，不让它删东西。”</a:t>
+            </a:r>
+          </a:p>
+          <a:p/>
+          <a:p>
+            <a:r>
+              <a:t>过渡：“认知讲完了，下面讲怎么做。”</a:t>
             </a:r>
           </a:p>
         </p:txBody>
@@ -1174,7 +1529,13 @@
           <a:lstStyle/>
           <a:p>
             <a:r>
-              <a:t>第二部分 · 怎么做（30–48 分钟），中间穿插演示 1。</a:t>
+              <a:t>PART 02 怎么做（约 10 秒）</a:t>
+            </a:r>
+          </a:p>
+          <a:p/>
+          <a:p>
+            <a:r>
+              <a:t>“第二部分：先想，再干。”</a:t>
             </a:r>
           </a:p>
         </p:txBody>
@@ -1244,7 +1605,61 @@
           <a:lstStyle/>
           <a:p>
             <a:r>
-              <a:t>五步是一个圈。转几圈以后，AI 就越来越像你。第 5 步就是 07-01 讲的规则固化。</a:t>
+              <a:t>先想后干五步（约 2 分钟）</a:t>
+            </a:r>
+          </a:p>
+          <a:p/>
+          <a:p>
+            <a:r>
+              <a:t>要讲清楚的事：五步是一个圈，转几圈 AI 就越来越像你。</a:t>
+            </a:r>
+          </a:p>
+          <a:p/>
+          <a:p>
+            <a:r>
+              <a:t>拿朋友圈这件事走一遍：</a:t>
+            </a:r>
+          </a:p>
+          <a:p/>
+          <a:p>
+            <a:r>
+              <a:t>“第一步，在 Chat 里想清楚：我的朋友圈要什么风格，发给谁，哪些话不能说。让它反问你。”</a:t>
+            </a:r>
+          </a:p>
+          <a:p/>
+          <a:p>
+            <a:r>
+              <a:t>“第二步，写成规则。上次我发给大家的那份朋友圈提示词，就是想清楚以后写下来的规则。”</a:t>
+            </a:r>
+          </a:p>
+          <a:p/>
+          <a:p>
+            <a:r>
+              <a:t>“第三步，交给 Work 批量干。每周丢一段录音进去，它出 7 条。”</a:t>
+            </a:r>
+          </a:p>
+          <a:p/>
+          <a:p>
+            <a:r>
+              <a:t>“第四步，你来验收、改稿。”</a:t>
+            </a:r>
+          </a:p>
+          <a:p/>
+          <a:p>
+            <a:r>
+              <a:t>“第五步最容易被忽略：你改了哪里，告诉它，让它写回规则里。7 月份讲过规则固化，就是这一步。”</a:t>
+            </a:r>
+          </a:p>
+          <a:p/>
+          <a:p>
+            <a:r>
+              <a:t>“转几圈以后，你会发现它写的越来越像你，你要改的越来越少。”</a:t>
+            </a:r>
+          </a:p>
+          <a:p/>
+          <a:p>
+            <a:r>
+              <a:t>过渡：“为什么非得这么走，不能跳一步？”</a:t>
             </a:r>
           </a:p>
         </p:txBody>
@@ -1314,7 +1729,47 @@
           <a:lstStyle/>
           <a:p>
             <a:r>
-              <a:t>公屏打数字，摸一下底。10/7 课上问过两次“AI 有没有在用”，都没有回答，今天先问清楚。</a:t>
+              <a:t>你现在用 AI 最多干什么（约 1 分 30 秒）</a:t>
+            </a:r>
+          </a:p>
+          <a:p/>
+          <a:p>
+            <a:r>
+              <a:t>要讲清楚的事：摸清学员现在用到哪一步，后面好对症。</a:t>
+            </a:r>
+          </a:p>
+          <a:p/>
+          <a:p>
+            <a:r>
+              <a:t>“大家公屏打个数字：你现在用 AI 最多干什么？1 问问题、搜东西，2 写文案，3 做图，4 基本没用。说实话就行，没人笑话你。”</a:t>
+            </a:r>
+          </a:p>
+          <a:p/>
+          <a:p>
+            <a:r>
+              <a:t>- 念几个公屏上的回答。大概率 1 和 2 最多。</a:t>
+            </a:r>
+          </a:p>
+          <a:p>
+            <a:r>
+              <a:t>- 记住这个结果，第 9 页讲“大部分人还停在 1.0”时要用。</a:t>
+            </a:r>
+          </a:p>
+          <a:p/>
+          <a:p>
+            <a:r>
+              <a:t>注意：10/7 课上问过两次“AI 有没有在用”，都没人回答。今天点名问，先把气氛带起来。</a:t>
+            </a:r>
+          </a:p>
+          <a:p/>
+          <a:p>
+            <a:r>
+              <a:t>过渡：</a:t>
+            </a:r>
+          </a:p>
+          <a:p>
+            <a:r>
+              <a:t>“好，同样一个任务，我让 AI 用两种方式干，大家看结果有什么不一样。”</a:t>
             </a:r>
           </a:p>
         </p:txBody>
@@ -1384,7 +1839,31 @@
           <a:lstStyle/>
           <a:p>
             <a:r>
-              <a:t>跳过任何一步都会白干。规则攒多了就是 Skill，下节课可以接着讲。</a:t>
+              <a:t>跳过任何一步，都会白干（约 1 分 30 秒）</a:t>
+            </a:r>
+          </a:p>
+          <a:p/>
+          <a:p>
+            <a:r>
+              <a:t>“不想清楚就派活，它干得很快，但干出来的一堆东西你用不上，时间白花了。”</a:t>
+            </a:r>
+          </a:p>
+          <a:p/>
+          <a:p>
+            <a:r>
+              <a:t>“想清楚了还一句一句聊，你自己就成了搬运工，AI 省下的时间又被你复制粘贴吃回去了。”</a:t>
+            </a:r>
+          </a:p>
+          <a:p/>
+          <a:p>
+            <a:r>
+              <a:t>“规则只写一次，以后它每次都按你的标准干。这样的规则攒多了，装进 AI 里，就叫 Skill。Skill 下次可以专门讲一节。”</a:t>
+            </a:r>
+          </a:p>
+          <a:p/>
+          <a:p>
+            <a:r>
+              <a:t>过渡：“第四步验收，具体看什么？”</a:t>
             </a:r>
           </a:p>
         </p:txBody>
@@ -1454,7 +1933,43 @@
           <a:lstStyle/>
           <a:p>
             <a:r>
-              <a:t>AI 出 80 分的初稿，你改到 100 分。发出去的东西由你负责。</a:t>
+              <a:t>验收看三样（约 1 分 30 秒）</a:t>
+            </a:r>
+          </a:p>
+          <a:p/>
+          <a:p>
+            <a:r>
+              <a:t>要讲清楚的事：AI 出 80 分，你改到 100 分，发出去的东西你负责。</a:t>
+            </a:r>
+          </a:p>
+          <a:p/>
+          <a:p>
+            <a:r>
+              <a:t>“看第一样：有没有编。货、价格、客户故事，是不是都来自你给它的素材？素材里没有的，它写出来了，就是编的，删掉。”</a:t>
+            </a:r>
+          </a:p>
+          <a:p/>
+          <a:p>
+            <a:r>
+              <a:t>“看第二样：有没有 AI 味。读出声来，像不像你平时说话？‘不得不说’‘在这个时代’‘家人们’这种词，一看就不是你。”</a:t>
+            </a:r>
+          </a:p>
+          <a:p/>
+          <a:p>
+            <a:r>
+              <a:t>“看第三样：有没有违规。文案里出现‘鉴定’两个字，有绝对化用语，或者承诺保值，统统改掉。”</a:t>
+            </a:r>
+          </a:p>
+          <a:p/>
+          <a:p>
+            <a:r>
+              <a:t>“AI 能交给你 80 分的稿子，剩下 20 分你来补。发出去的东西，由你负责。”</a:t>
+            </a:r>
+          </a:p>
+          <a:p/>
+          <a:p>
+            <a:r>
+              <a:t>过渡：“Chat 怎么用才想得清楚？就一个诀窍。”</a:t>
             </a:r>
           </a:p>
         </p:txBody>
@@ -1524,7 +2039,19 @@
           <a:lstStyle/>
           <a:p>
             <a:r>
-              <a:t>02-25 讲过“让 AI 反问你”。这一页是过渡，下一页开始演示 1。</a:t>
+              <a:t>让 AI 反问你（约 30 秒）</a:t>
+            </a:r>
+          </a:p>
+          <a:p/>
+          <a:p>
+            <a:r>
+              <a:t>“让 AI 反问你。就一句话：‘先别写，一次只问我一个问题。’2 月份讲过这一招。”</a:t>
+            </a:r>
+          </a:p>
+          <a:p/>
+          <a:p>
+            <a:r>
+              <a:t>“很多事你自己也说不清楚，比如你的定位。让它一个一个问，你一个一个答，答着答着就清楚了，它也终于知道你是谁了。下面我现场做一遍。”</a:t>
             </a:r>
           </a:p>
         </p:txBody>
@@ -1594,12 +2121,67 @@
           <a:lstStyle/>
           <a:p>
             <a:r>
-              <a:t>演示 1：在豆包、DeepSeek 或 AI 大脑里贴提示词①，用你自己的店现场回答它的问题，最后拿到 3 句定位备选。</a:t>
-            </a:r>
-          </a:p>
-          <a:p>
-            <a:r>
-              <a:t>这就是把 10/14 的三角图（人设、人群、需求）落地。提示词课后发群。</a:t>
+              <a:t>演示 1：让 AI 反问你，写出定位句（约 5 分钟）</a:t>
+            </a:r>
+          </a:p>
+          <a:p/>
+          <a:p>
+            <a:r>
+              <a:t>要讲清楚的事：现场看 Chat 怎么用，把 10/14 的三角图落地。</a:t>
+            </a:r>
+          </a:p>
+          <a:p/>
+          <a:p>
+            <a:r>
+              <a:t>演示步骤：</a:t>
+            </a:r>
+          </a:p>
+          <a:p>
+            <a:r>
+              <a:t>1. 打开豆包、DeepSeek 或 AI 大脑，哪个都行。共享屏幕前先把字号放大。</a:t>
+            </a:r>
+          </a:p>
+          <a:p>
+            <a:r>
+              <a:t>2. 粘贴提示词①。</a:t>
+            </a:r>
+          </a:p>
+          <a:p>
+            <a:r>
+              <a:t>3. 它会一个一个问问题，你用自己的店现场回答。课前先想好怎么答，别现场卡壳。</a:t>
+            </a:r>
+          </a:p>
+          <a:p>
+            <a:r>
+              <a:t>4. 问完它给出 3 句定位，你逐句点评：哪句最像你，为什么。</a:t>
+            </a:r>
+          </a:p>
+          <a:p/>
+          <a:p>
+            <a:r>
+              <a:t>“大家注意看它问的问题：你专业在哪、你懂客户什么，这是人设；你的客户是谁、急不急、买不买得起，这是人群；客户要什么结果、能不能用数字说清楚，这是需求。10/14 讲的三角图，三个角它全问到了。”</a:t>
+            </a:r>
+          </a:p>
+          <a:p/>
+          <a:p>
+            <a:r>
+              <a:t>注意：</a:t>
+            </a:r>
+          </a:p>
+          <a:p>
+            <a:r>
+              <a:t>- 它要是一次问一堆问题，就回它一句：“一次只问一个。”</a:t>
+            </a:r>
+          </a:p>
+          <a:p>
+            <a:r>
+              <a:t>- 模型慢就放录屏。10/7 课上等了两分钟，这次别等。</a:t>
+            </a:r>
+          </a:p>
+          <a:p/>
+          <a:p>
+            <a:r>
+              <a:t>过渡：“定位有了，选题就好办了。”</a:t>
             </a:r>
           </a:p>
         </p:txBody>
@@ -1669,12 +2251,47 @@
           <a:lstStyle/>
           <a:p>
             <a:r>
-              <a:t>演示 1 接着做：在同一个对话里发提示词②，按“换人群、换品牌”出 30 个选题。</a:t>
-            </a:r>
-          </a:p>
-          <a:p>
-            <a:r>
-              <a:t>补上 10/14 说过但没演示的“选题往 AI 里一输就出来”。</a:t>
+              <a:t>演示 1：接着出 30 个选题（约 3 分钟）</a:t>
+            </a:r>
+          </a:p>
+          <a:p/>
+          <a:p>
+            <a:r>
+              <a:t>演示步骤：</a:t>
+            </a:r>
+          </a:p>
+          <a:p>
+            <a:r>
+              <a:t>1. 在同一个对话里接着发提示词②。</a:t>
+            </a:r>
+          </a:p>
+          <a:p>
+            <a:r>
+              <a:t>2. 等它出 30 个选题后，挑 3 个念出来，指给学员看规律：痛点没变，换的是品牌或人群。</a:t>
+            </a:r>
+          </a:p>
+          <a:p/>
+          <a:p>
+            <a:r>
+              <a:t>“10/14 那节我说过一句话：干货永远不变，变的只是选题。你看这 30 个，同一个痛点，换成古驰、换成香奈儿，换成上班族、换成宝妈，每一个都是一条新内容。那节课说‘选题往 AI 里一输就出来’，今天就是这么出来的。”</a:t>
+            </a:r>
+          </a:p>
+          <a:p/>
+          <a:p>
+            <a:r>
+              <a:t>“提示词里我特意写了‘不写鉴定类选题’。鉴定类内容容易把人群带偏，3 月份讲过。”</a:t>
+            </a:r>
+          </a:p>
+          <a:p/>
+          <a:p>
+            <a:r>
+              <a:t>互动：“这 30 个里，你觉得哪个最适合你店？打序号。”</a:t>
+            </a:r>
+          </a:p>
+          <a:p/>
+          <a:p>
+            <a:r>
+              <a:t>过渡：“Chat 这边看完了。给 Work 派活，要交代哪几样？”</a:t>
             </a:r>
           </a:p>
         </p:txBody>
@@ -1744,7 +2361,61 @@
           <a:lstStyle/>
           <a:p>
             <a:r>
-              <a:t>拿上次发的《朋友圈提示词》逐项对照：提示词很长，拆开就是这五样。写一次，以后每周都能用。02-11 讲过提示词五要素，这是给 Work 派活的版本。</a:t>
+              <a:t>派活五件套（约 3 分钟）</a:t>
+            </a:r>
+          </a:p>
+          <a:p/>
+          <a:p>
+            <a:r>
+              <a:t>要讲清楚的事：给 Work 派活交代这五样，它才干得像你。拿上次的朋友圈提示词逐项对照。</a:t>
+            </a:r>
+          </a:p>
+          <a:p/>
+          <a:p>
+            <a:r>
+              <a:t>“第一样是背景：我是谁、我的店、我的客户。朋友圈提示词最前面的‘我的档案’就是干这个的。”</a:t>
+            </a:r>
+          </a:p>
+          <a:p/>
+          <a:p>
+            <a:r>
+              <a:t>“第二样是素材：录音、表格、照片。没有素材，它只能编。”</a:t>
+            </a:r>
+          </a:p>
+          <a:p/>
+          <a:p>
+            <a:r>
+              <a:t>“第三样是要求：格式、字数、红线。提示词里的铁律、写作要求就是这个。”</a:t>
+            </a:r>
+          </a:p>
+          <a:p/>
+          <a:p>
+            <a:r>
+              <a:t>“第四样是例子：你写过的好东西。档案里让你贴 3–5 条自己写的朋友圈，就是让它学你的口气。”</a:t>
+            </a:r>
+          </a:p>
+          <a:p/>
+          <a:p>
+            <a:r>
+              <a:t>“第五样是验收标准：什么样算合格。提示词最后那张自查清单就是。”</a:t>
+            </a:r>
+          </a:p>
+          <a:p/>
+          <a:p>
+            <a:r>
+              <a:t>“你看那份提示词很长，拆开就是这五样。写一次，以后每周都能用。2 月份讲过提示词五要素，这是给 Work 派活的版本。”</a:t>
+            </a:r>
+          </a:p>
+          <a:p/>
+          <a:p>
+            <a:r>
+              <a:t>互动：“上次发的朋友圈提示词，有谁已经用过了？扣 1。”</a:t>
+            </a:r>
+          </a:p>
+          <a:p/>
+          <a:p>
+            <a:r>
+              <a:t>过渡：“道理讲完了，现场干一遍。”</a:t>
             </a:r>
           </a:p>
         </p:txBody>
@@ -1814,7 +2485,13 @@
           <a:lstStyle/>
           <a:p>
             <a:r>
-              <a:t>第三部分 · 现场实操（48–56 分钟）。</a:t>
+              <a:t>PART 03 实操（约 10 秒）</a:t>
+            </a:r>
+          </a:p>
+          <a:p/>
+          <a:p>
+            <a:r>
+              <a:t>“第三部分：一个文件夹，出一周朋友圈。”</a:t>
             </a:r>
           </a:p>
         </p:txBody>
@@ -1884,7 +2561,31 @@
           <a:lstStyle/>
           <a:p>
             <a:r>
-              <a:t>演示 2：打开电脑上的“10-28演示”文件夹，给学员看里面放了什么。强调逐字稿先删掉客户姓名、电话。一个项目一个文件夹（08-12）。</a:t>
+              <a:t>演示 2：先备好一个文件夹（约 1 分钟）</a:t>
+            </a:r>
+          </a:p>
+          <a:p/>
+          <a:p>
+            <a:r>
+              <a:t>演示：打开电脑上的“10-28演示”文件夹，给学员看里面的三个文件。</a:t>
+            </a:r>
+          </a:p>
+          <a:p/>
+          <a:p>
+            <a:r>
+              <a:t>“文件 1 是录音逐字稿，我店里的一段，客户的名字和电话我已经删掉了。文件 2 是上次发的朋友圈提示词。文件 3 是我自己写过的几条朋友圈，让它学我的口气。”</a:t>
+            </a:r>
+          </a:p>
+          <a:p/>
+          <a:p>
+            <a:r>
+              <a:t>“为什么非要单独建一个文件夹？8 月份讲过，一个项目一个文件夹。它只看这个文件夹，别的文件碰不到，也不会被别的项目的资料带偏。”</a:t>
+            </a:r>
+          </a:p>
+          <a:p/>
+          <a:p>
+            <a:r>
+              <a:t>过渡：“东西备齐了，开始派活。”</a:t>
             </a:r>
           </a:p>
         </p:txBody>
@@ -1954,12 +2655,62 @@
           <a:lstStyle/>
           <a:p>
             <a:r>
-              <a:t>演示 2：在 WorkBuddy 里选中“10-28演示”文件夹，发这段话，等它生成表格。</a:t>
-            </a:r>
-          </a:p>
-          <a:p>
-            <a:r>
-              <a:t>等的时候讲：Work 是自己一步步在做，你可以去忙别的。现场卡了就放录屏。</a:t>
+              <a:t>演示 2：在 WorkBuddy 里派活（约 3 分钟）</a:t>
+            </a:r>
+          </a:p>
+          <a:p/>
+          <a:p>
+            <a:r>
+              <a:t>演示步骤：</a:t>
+            </a:r>
+          </a:p>
+          <a:p>
+            <a:r>
+              <a:t>1. 打开 WorkBuddy，选中“10-28演示”这个文件夹。</a:t>
+            </a:r>
+          </a:p>
+          <a:p>
+            <a:r>
+              <a:t>2. 粘贴派活的话，发出去。</a:t>
+            </a:r>
+          </a:p>
+          <a:p>
+            <a:r>
+              <a:t>3. 等它干活的时候，逐句讲这段派活的话。</a:t>
+            </a:r>
+          </a:p>
+          <a:p/>
+          <a:p>
+            <a:r>
+              <a:t>“第一句告诉它读什么、按什么规则写。第二句告诉它交付物长什么样：一张表格，有哪几列。第三句是安全：原来的文件不许改、不许删。”</a:t>
+            </a:r>
+          </a:p>
+          <a:p/>
+          <a:p>
+            <a:r>
+              <a:t>“它现在在一步步自己干。真实情况下这几分钟你可以去接待客户，回来再验收。”</a:t>
+            </a:r>
+          </a:p>
+          <a:p/>
+          <a:p>
+            <a:r>
+              <a:t>注意：</a:t>
+            </a:r>
+          </a:p>
+          <a:p>
+            <a:r>
+              <a:t>- 卡住超过一分钟就切到录屏，别干等。</a:t>
+            </a:r>
+          </a:p>
+          <a:p>
+            <a:r>
+              <a:t>- 共享屏幕前先放大字号，10/7 有学员说看不清。</a:t>
+            </a:r>
+          </a:p>
+          <a:p/>
+          <a:p>
+            <a:r>
+              <a:t>过渡：“好，它交活了，我们来验收。”</a:t>
             </a:r>
           </a:p>
         </p:txBody>
@@ -2029,12 +2780,55 @@
           <a:lstStyle/>
           <a:p>
             <a:r>
-              <a:t>演示 2 验收：打开表格，先看三样；挑一条现场过嘴改稿；再把改的地方告诉它。</a:t>
-            </a:r>
-          </a:p>
-          <a:p>
-            <a:r>
-              <a:t>这就补上了 10/7 没讲的“怎么改掉 AI 味”。</a:t>
+              <a:t>演示 2：验收，再改一条（约 3 分钟）</a:t>
+            </a:r>
+          </a:p>
+          <a:p/>
+          <a:p>
+            <a:r>
+              <a:t>演示步骤：</a:t>
+            </a:r>
+          </a:p>
+          <a:p>
+            <a:r>
+              <a:t>1. 打开它生成的表格，先按三样快速过一遍：有没有编、有没有 AI 味、有没有违规。</a:t>
+            </a:r>
+          </a:p>
+          <a:p>
+            <a:r>
+              <a:t>2. 挑一条，最好是周四的老板日记或周一的上新，现场过嘴改稿：</a:t>
+            </a:r>
+          </a:p>
+          <a:p>
+            <a:r>
+              <a:t>   - 把“不得不说”“在这个时代”这类 AI 腔删掉</a:t>
+            </a:r>
+          </a:p>
+          <a:p>
+            <a:r>
+              <a:t>   - 长句拆成短句</a:t>
+            </a:r>
+          </a:p>
+          <a:p>
+            <a:r>
+              <a:t>   - 换成你平时说话的口气</a:t>
+            </a:r>
+          </a:p>
+          <a:p>
+            <a:r>
+              <a:t>3. 改完回到 WorkBuddy，告诉它：“以后别用‘不得不说’，句子再短一点。”</a:t>
+            </a:r>
+          </a:p>
+          <a:p/>
+          <a:p>
+            <a:r>
+              <a:t>“这就是先想后干的第 5 步：改的地方写回规则。下周它就不会再犯同样的错。10/7 讲过回复像 AI 会丢单，AI 味就是这么一点点改掉的。”</a:t>
+            </a:r>
+          </a:p>
+          <a:p/>
+          <a:p>
+            <a:r>
+              <a:t>过渡：“时间够的话，再看一个跟钱有关的。”</a:t>
             </a:r>
           </a:p>
         </p:txBody>
@@ -2104,22 +2898,53 @@
           <a:lstStyle/>
           <a:p>
             <a:r>
-              <a:t>演示：放课前录好的两张截图。任务都是“根据这段录音，帮我写下周 7 条朋友圈”。</a:t>
-            </a:r>
-          </a:p>
-          <a:p>
-            <a:r>
-              <a:t>Chat 给的是一大段文字，要你自己复制、整理、存；Work 直接在文件夹里放好一张表格。</a:t>
-            </a:r>
-          </a:p>
-          <a:p>
-            <a:r>
-              <a:t>可以这样说：同样是 AI，一个陪你聊，一个替你干。今天就讲清楚，什么时候聊，什么时候派活。</a:t>
-            </a:r>
-          </a:p>
-          <a:p>
-            <a:r>
-              <a:t>（可以在这一页插入两张截图）</a:t>
+              <a:t>同一个任务，两种结果（约 1 分 30 秒）</a:t>
+            </a:r>
+          </a:p>
+          <a:p/>
+          <a:p>
+            <a:r>
+              <a:t>要讲清楚的事：同样是 AI，一个给你一段话，一个交给你一个做好的东西。</a:t>
+            </a:r>
+          </a:p>
+          <a:p/>
+          <a:p>
+            <a:r>
+              <a:t>演示：</a:t>
+            </a:r>
+          </a:p>
+          <a:p>
+            <a:r>
+              <a:t>- 放课前截好的两张图，任务都是“根据这段录音，写下周 7 条朋友圈”。</a:t>
+            </a:r>
+          </a:p>
+          <a:p>
+            <a:r>
+              <a:t>- 这页 PPT 里没有放图，你把截图贴进来，或者现场切屏。</a:t>
+            </a:r>
+          </a:p>
+          <a:p/>
+          <a:p>
+            <a:r>
+              <a:t>“左边是在聊天框里做的。它给我一大段文字，我还得自己复制、整理、一条条存起来。”</a:t>
+            </a:r>
+          </a:p>
+          <a:p/>
+          <a:p>
+            <a:r>
+              <a:t>“右边是在 WorkBuddy 里做的。我回来一看，文件夹里多了一张表格，周一到周日、正文、配图建议，都排好了。”</a:t>
+            </a:r>
+          </a:p>
+          <a:p/>
+          <a:p>
+            <a:r>
+              <a:t>“同样是 AI，一个陪你聊，一个替你干。今天就讲清楚：什么时候聊，什么时候派活。”</a:t>
+            </a:r>
+          </a:p>
+          <a:p/>
+          <a:p>
+            <a:r>
+              <a:t>过渡：先把今天这句话放在这儿。</a:t>
             </a:r>
           </a:p>
         </p:txBody>
@@ -2189,12 +3014,52 @@
           <a:lstStyle/>
           <a:p>
             <a:r>
-              <a:t>演示 3（时间够再做）：用示例数据，或者脱敏后的真实库存表。</a:t>
-            </a:r>
-          </a:p>
-          <a:p>
-            <a:r>
-              <a:t>回扣 07-15 的周转纪律：超过 30 天的货要有处理方案。建议只是参考，降不降价你来定。</a:t>
+              <a:t>演示 3：一张库存表，找出压款的货（选做，约 3 分钟）</a:t>
+            </a:r>
+          </a:p>
+          <a:p/>
+          <a:p>
+            <a:r>
+              <a:t>要讲清楚的事：Work 不只能写文案，表格和钱的事也能干。</a:t>
+            </a:r>
+          </a:p>
+          <a:p/>
+          <a:p>
+            <a:r>
+              <a:t>演示步骤：</a:t>
+            </a:r>
+          </a:p>
+          <a:p>
+            <a:r>
+              <a:t>1. 用示例库存表，或者脱敏后的真实库存表。</a:t>
+            </a:r>
+          </a:p>
+          <a:p>
+            <a:r>
+              <a:t>2. 发派活的话，等它出一张新表。</a:t>
+            </a:r>
+          </a:p>
+          <a:p>
+            <a:r>
+              <a:t>3. 挑一两只货，讲它给的处理建议。</a:t>
+            </a:r>
+          </a:p>
+          <a:p/>
+          <a:p>
+            <a:r>
+              <a:t>“7 月份讲周转纪律：超过 30 天的货要有处理方案。以前你得自己一行行算，现在它几分钟就给你排好了，压钱最多的排在最前面。但它给的降价、换渠道这些建议只是参考，最后怎么处理你来定。”</a:t>
+            </a:r>
+          </a:p>
+          <a:p/>
+          <a:p>
+            <a:r>
+              <a:t>注意：时间不够就跳过，说一句“这个大家回去可以自己试，派活的话我发群里”。</a:t>
+            </a:r>
+          </a:p>
+          <a:p/>
+          <a:p>
+            <a:r>
+              <a:t>过渡：“好，留作业。”</a:t>
             </a:r>
           </a:p>
         </p:txBody>
@@ -2264,7 +3129,37 @@
           <a:lstStyle/>
           <a:p>
             <a:r>
-              <a:t>作业分层布置。课后发群：提示词①②、两段派活的话。</a:t>
+              <a:t>作业（约 2 分钟）</a:t>
+            </a:r>
+          </a:p>
+          <a:p/>
+          <a:p>
+            <a:r>
+              <a:t>“作业分三档，按你店的情况选。”</a:t>
+            </a:r>
+          </a:p>
+          <a:p/>
+          <a:p>
+            <a:r>
+              <a:t>“起步店：用提示词①，让 AI 反问你，写出你的定位句，发到群里，我来帮你改。”</a:t>
+            </a:r>
+          </a:p>
+          <a:p/>
+          <a:p>
+            <a:r>
+              <a:t>“成熟店：用 Work 把一段录音做成下周 7 条朋友圈的表格，自己改好其中 3 条，截图发群里。”</a:t>
+            </a:r>
+          </a:p>
+          <a:p/>
+          <a:p>
+            <a:r>
+              <a:t>“所有人：写下你店里最重复的 3 件活，下次我们挑一件做成 Skill。”</a:t>
+            </a:r>
+          </a:p>
+          <a:p/>
+          <a:p>
+            <a:r>
+              <a:t>“提示词①②，还有两段派活的话，课后我都发到群里，直接复制就能用。”</a:t>
             </a:r>
           </a:p>
         </p:txBody>
@@ -2334,7 +3229,19 @@
           <a:lstStyle/>
           <a:p>
             <a:r>
-              <a:t>下节课两个方向二选一，可以让学员公屏投票，也可以你直接定。</a:t>
+              <a:t>下节课预告（约 1 分钟）</a:t>
+            </a:r>
+          </a:p>
+          <a:p/>
+          <a:p>
+            <a:r>
+              <a:t>“下节课两个方向，大家投票。1 是 Skill 专场，把今天写的规则装进 AI，变成一直能用的技能。2 是双 11 和年前冲刺：双 11 还有两周，离过年三个月，把节点内容排好。公屏打 1 或 2。”</a:t>
+            </a:r>
+          </a:p>
+          <a:p/>
+          <a:p>
+            <a:r>
+              <a:t>注意：票数接近的话，你直接定。</a:t>
             </a:r>
           </a:p>
         </p:txBody>
@@ -2404,7 +3311,13 @@
           <a:lstStyle/>
           <a:p>
             <a:r>
-              <a:t>收尾回扣开场那句话。</a:t>
+              <a:t>最后一句（约 30 秒）</a:t>
+            </a:r>
+          </a:p>
+          <a:p/>
+          <a:p>
+            <a:r>
+              <a:t>“最后回到开头那句话：Chat 用来想，Work 用来干。你只做两件事，给素材，做判断。今天回去就挑一件事试一试，有问题群里找我，我们下周见。”</a:t>
             </a:r>
           </a:p>
         </p:txBody>
@@ -2474,7 +3387,19 @@
           <a:lstStyle/>
           <a:p>
             <a:r>
-              <a:t>本课一句话，结尾再回扣一次。</a:t>
+              <a:t>今天只讲一件事（约 30 秒）</a:t>
+            </a:r>
+          </a:p>
+          <a:p/>
+          <a:p>
+            <a:r>
+              <a:t>“今天只讲一句话：Chat 用来想，Work 用来干。先在 Chat 里把事想清楚，再把活派给 Work。你自己只做两件事：给素材，做判断。这句话下课前我还会再说一遍。”</a:t>
+            </a:r>
+          </a:p>
+          <a:p/>
+          <a:p>
+            <a:r>
+              <a:t>过渡：看一下今天怎么走。</a:t>
             </a:r>
           </a:p>
         </p:txBody>
@@ -2544,7 +3469,19 @@
           <a:lstStyle/>
           <a:p>
             <a:r>
-              <a:t>告诉学员：今天三段，边讲边演示，下课带走两个能直接复制的提示词。</a:t>
+              <a:t>今天的路线（约 30 秒）</a:t>
+            </a:r>
+          </a:p>
+          <a:p/>
+          <a:p>
+            <a:r>
+              <a:t>“今天分三段。第一段破认知：AI 到底是什么，Chat 和 Work 有什么区别，大家用 AI 最常见的八个误区。第二段讲怎么做。第三段我现场演示。边讲边演示，下课你能带走两个能直接复制的提示词。”</a:t>
+            </a:r>
+          </a:p>
+          <a:p/>
+          <a:p>
+            <a:r>
+              <a:t>过渡：先从最基础的说起。</a:t>
             </a:r>
           </a:p>
         </p:txBody>
@@ -2614,7 +3551,13 @@
           <a:lstStyle/>
           <a:p>
             <a:r>
-              <a:t>第一部分 · 破认知（05–30 分钟）。</a:t>
+              <a:t>PART 01 破认知（约 10 秒）</a:t>
+            </a:r>
+          </a:p>
+          <a:p/>
+          <a:p>
+            <a:r>
+              <a:t>“第一部分，先把认知掰正：AI 走到哪一步了。”</a:t>
             </a:r>
           </a:p>
         </p:txBody>
@@ -2684,7 +3627,87 @@
           <a:lstStyle/>
           <a:p>
             <a:r>
-              <a:t>用大白话讲 AI 是什么。可以这样说：你招了一个读过全世界资料的实习生，聪明、勤快、不睡觉，但他第一天上班，不认识你的店，也不认识你的客户。你不告诉他，他就瞎编。</a:t>
+              <a:t>一个读过海量资料的实习生（约 2 分 30 秒）</a:t>
+            </a:r>
+          </a:p>
+          <a:p/>
+          <a:p>
+            <a:r>
+              <a:t>要讲清楚的事：AI 很能干，但它对你一无所知，你得“喂”它。这一页给后面的“派活五件套”打底。</a:t>
+            </a:r>
+          </a:p>
+          <a:p/>
+          <a:p>
+            <a:r>
+              <a:t>“你们店里招过实习生吧？AI 就像一个新来的实习生，只不过他把全世界的书都读完了。”</a:t>
+            </a:r>
+          </a:p>
+          <a:p/>
+          <a:p>
+            <a:r>
+              <a:t>“先说它的好：聪明、勤快、不睡觉。半夜十二点让它写 50 条文案，它不会跟你抱怨。你一年的流水表扔给它，几秒钟就读完了。一个月的客户聊天记录，你自己翻要一下午，它几分钟就能整理出客户最常问的 10 个问题。”</a:t>
+            </a:r>
+          </a:p>
+          <a:p/>
+          <a:p>
+            <a:r>
+              <a:t>“但是它不认识你的店，也不认识你的客户。它不知道你是做回收还是做寄卖，不知道你的客户是宝妈还是做生意的老板，也不知道你平时说话什么口气。你不告诉它，它就按‘所有人’的样子写。写出来像所有人，这就是 AI 味。”</a:t>
+            </a:r>
+          </a:p>
+          <a:p/>
+          <a:p>
+            <a:r>
+              <a:t>“它也不知道今天的行情。这周 LV 二手价跌没跌，今天金价多少，平台上个月出了什么新规，它不一定知道。就算能联网，查到的也只是网上公开的，查不到你们圈子里真实的成交价。”</a:t>
+            </a:r>
+          </a:p>
+          <a:p/>
+          <a:p>
+            <a:r>
+              <a:t>“最要命的是：它不懂的时候不会说不知道，它会编，而且编得很像真的。你问它某款包现在回收多少钱，它能给你一个特别具体的数字。这在行业里叫‘幻觉’。所以价格、行情、平台规定、法律条文，AI 说的只能当线索，一律自己核实。”</a:t>
+            </a:r>
+          </a:p>
+          <a:p/>
+          <a:p>
+            <a:r>
+              <a:t>“它能干多好，取决于你给它多少。实习生第一天什么都不懂，你带他一个月就好用了。我 3 月份就说过：没有数据积累，它就永远是个新员工。”</a:t>
+            </a:r>
+          </a:p>
+          <a:p/>
+          <a:p>
+            <a:r>
+              <a:t>可选演示：</a:t>
+            </a:r>
+          </a:p>
+          <a:p>
+            <a:r>
+              <a:t>- 现场问 AI：“LV Neverfull 中号九成新，现在二手回收价多少？”</a:t>
+            </a:r>
+          </a:p>
+          <a:p>
+            <a:r>
+              <a:t>- 等它报出一个数字，再问学员：“这个价你敢直接报给客户吗？”</a:t>
+            </a:r>
+          </a:p>
+          <a:p>
+            <a:r>
+              <a:t>- AI 每次回答不一样，课前先试一次，把它编出数字的那次截图备用。</a:t>
+            </a:r>
+          </a:p>
+          <a:p/>
+          <a:p>
+            <a:r>
+              <a:t>互动：“你被 AI 一本正经地骗过吗？骗过的扣 1。”</a:t>
+            </a:r>
+          </a:p>
+          <a:p/>
+          <a:p>
+            <a:r>
+              <a:t>过渡：</a:t>
+            </a:r>
+          </a:p>
+          <a:p>
+            <a:r>
+              <a:t>“这个实习生聪不聪明，和他能干什么活，其实是两回事。”</a:t>
             </a:r>
           </a:p>
         </p:txBody>
@@ -2754,12 +3777,82 @@
           <a:lstStyle/>
           <a:p>
             <a:r>
-              <a:t>模型是大脑，工具是工位。同一个 DeepSeek，放在对话框里只能陪你聊，放进 WorkBuddy 就能读你的文件、替你干活。</a:t>
-            </a:r>
-          </a:p>
-          <a:p>
-            <a:r>
-              <a:t>积分、Token 就是成本（02-11、04-08 讲过）。</a:t>
+              <a:t>模型是大脑，工具是工位（约 2 分钟）</a:t>
+            </a:r>
+          </a:p>
+          <a:p/>
+          <a:p>
+            <a:r>
+              <a:t>要讲清楚的事：AI 好不好用看两样，大脑和工位，很多人把这两样搞混了。</a:t>
+            </a:r>
+          </a:p>
+          <a:p/>
+          <a:p>
+            <a:r>
+              <a:t>“很多人说‘我用的是豆包’。可豆包既是一个大脑的名字，也是一个 App 的名字。今天先把这两个词分清楚。”</a:t>
+            </a:r>
+          </a:p>
+          <a:p/>
+          <a:p>
+            <a:r>
+              <a:t>“DeepSeek、豆包、Kimi、智谱，这些是大脑，决定它聪不聪明。哪个最好用，别听别人说。同一个活让两三个大脑都干一遍，比一比就知道了。”</a:t>
+            </a:r>
+          </a:p>
+          <a:p/>
+          <a:p>
+            <a:r>
+              <a:t>“工具是工位，决定它能干什么活。你店里一个懂行的师傅，坐在柜台他接待客人，坐在验货台他查验，进了仓库他盘库存。还是同一个人，换了工位，干的活不一样。”</a:t>
+            </a:r>
+          </a:p>
+          <a:p/>
+          <a:p>
+            <a:r>
+              <a:t>“AI 也一样。坐在聊天框这个工位上，它只能陪你聊。坐进 WorkBuddy，就等于给它配了一台电脑：能读你的文件夹、改表格、定时干活、往微信推消息。WorkBuddy 里面还能换大脑。同一个大脑，放进聊天框是参谋，放进 WorkBuddy 就是员工。”</a:t>
+            </a:r>
+          </a:p>
+          <a:p/>
+          <a:p>
+            <a:r>
+              <a:t>“分清了这两样，你就不会再犯三个错。第一，别再问‘哪个 AI 最好’，先问‘我要它干什么活’，先挑工位，再挑大脑。第二，觉得 AI 不行，很多时候不是大脑笨，是工位不对。第三，新模型天天出，你不用天天换工具，换个大脑就行。”</a:t>
+            </a:r>
+          </a:p>
+          <a:p/>
+          <a:p>
+            <a:r>
+              <a:t>“最后说下成本：大脑干活要‘烧’积分，也就是 Token。越聪明的大脑越贵，文件越长越贵。简单的活用便宜的大脑，难的活再换好的。2 月份讲过：Token 就是成本。”</a:t>
+            </a:r>
+          </a:p>
+          <a:p/>
+          <a:p>
+            <a:r>
+              <a:t>互动：“你现在主要坐在哪个工位上？1 豆包 App，2 DeepSeek，3 WorkBuddy，4 AI 大脑。”</a:t>
+            </a:r>
+          </a:p>
+          <a:p/>
+          <a:p>
+            <a:r>
+              <a:t>注意：</a:t>
+            </a:r>
+          </a:p>
+          <a:p>
+            <a:r>
+              <a:t>- 不说具体哪个模型最好，也不报价格。</a:t>
+            </a:r>
+          </a:p>
+          <a:p>
+            <a:r>
+              <a:t>- 10/7 课上说的两个优惠已经过期，别再讲。</a:t>
+            </a:r>
+          </a:p>
+          <a:p/>
+          <a:p>
+            <a:r>
+              <a:t>过渡：</a:t>
+            </a:r>
+          </a:p>
+          <a:p>
+            <a:r>
+              <a:t>“工位决定了 AI 能干到哪一步。AI 这几年是怎么一步步走过来的？”</a:t>
             </a:r>
           </a:p>
         </p:txBody>
@@ -2829,27 +3922,73 @@
           <a:lstStyle/>
           <a:p>
             <a:r>
-              <a:t>这是你自己的分法，年份说“大概”。</a:t>
-            </a:r>
-          </a:p>
-          <a:p>
-            <a:r>
-              <a:t>1.0 会聊天：问一句答一句，当搜索框。</a:t>
-            </a:r>
-          </a:p>
-          <a:p>
-            <a:r>
-              <a:t>2.0 会思考：深度思考、联网查资料，当参谋。</a:t>
-            </a:r>
-          </a:p>
-          <a:p>
-            <a:r>
-              <a:t>3.0 会干活：在你电脑上读文件、改表格、批量做、定时做，当员工。</a:t>
-            </a:r>
-          </a:p>
-          <a:p>
-            <a:r>
-              <a:t>可以这样说：大部分人还停在 1.0，把 AI 当搜索框，问完复制粘贴。今天要升两级。</a:t>
+              <a:t>AI 的三个阶段（约 2 分 30 秒）</a:t>
+            </a:r>
+          </a:p>
+          <a:p/>
+          <a:p>
+            <a:r>
+              <a:t>要讲清楚的事：1.0 会聊、2.0 会想、3.0 会干。今天要学的就是用好 2.0 和 3.0。</a:t>
+            </a:r>
+          </a:p>
+          <a:p/>
+          <a:p>
+            <a:r>
+              <a:t>“先说一句，这是我自己的分法，年份也是个大概。”</a:t>
+            </a:r>
+          </a:p>
+          <a:p/>
+          <a:p>
+            <a:r>
+              <a:t>“1.0 会聊天。2023 年前后，你问它‘帮我写一条卖 LV 的朋友圈’，它给你一段话，你复制粘贴。问一句答一句，它就是个高级点的搜索框。”</a:t>
+            </a:r>
+          </a:p>
+          <a:p/>
+          <a:p>
+            <a:r>
+              <a:t>“2.0 会思考。2025 年前后，比如 DeepSeek 深度思考火起来那阵，它会先想再答，还能联网查资料。你问它‘双 11 我店里该搞什么活动’，它会分析你的情况，列几套方案，讲每套的好处和坑。这时候它是你的参谋。”</a:t>
+            </a:r>
+          </a:p>
+          <a:p/>
+          <a:p>
+            <a:r>
+              <a:t>“3.0 会干活。现在你跟它说：‘把这个文件夹里的录音做成下周 7 条朋友圈，存成表格。’它自己打开文件、写好、存好，还能每天早上把当天那条推到你微信上。这时候它就是员工。”</a:t>
+            </a:r>
+          </a:p>
+          <a:p/>
+          <a:p>
+            <a:r>
+              <a:t>“这不是 AI 换了一个更聪明的，是它长本事了：1.0 只有一张嘴，2.0 多了个脑子，3.0 又长出一双手。3.0 来了也不是说前面两样没用了，这三样本事现在一个工具里基本都有，就看你会不会用。”</a:t>
+            </a:r>
+          </a:p>
+          <a:p/>
+          <a:p>
+            <a:r>
+              <a:t>按第 2 页公屏的结果说。如果大部分人打的是 1 和 2：</a:t>
+            </a:r>
+          </a:p>
+          <a:p/>
+          <a:p>
+            <a:r>
+              <a:t>“刚才开场，大部分人打的是 1 和 2：问问题、写文案。工具早就是 3.0 的了，用法还停在 1.0。今天要升两级：要想的事用 2.0，也就是 Chat；要干的活用 3.0，也就是 Work。”</a:t>
+            </a:r>
+          </a:p>
+          <a:p/>
+          <a:p>
+            <a:r>
+              <a:t>互动：“你现在停在几点零？1.0 扣 1，2.0 扣 2，3.0 扣 3。”</a:t>
+            </a:r>
+          </a:p>
+          <a:p/>
+          <a:p>
+            <a:r>
+              <a:t>注意：年份只说“大概”，DeepSeek 说“火起来那阵”就行，不说具体哪个月。</a:t>
+            </a:r>
+          </a:p>
+          <a:p/>
+          <a:p>
+            <a:r>
+              <a:t>过渡：“3.0 到底能干到哪一步？”</a:t>
             </a:r>
           </a:p>
         </p:txBody>
